--- a/clover3_coding_buddies.pptx
+++ b/clover3_coding_buddies.pptx
@@ -4812,7 +4812,7 @@
       </p:sp>
       <p:sp>
         <p:nvSpPr>
-          <p:cNvPr id="182" name="We decided to go with a Svelte + Kotlin + PostgreSQL stack"/>
+          <p:cNvPr id="182" name="We decided to go with a Svelte + Ktor + PostgreSQL stack"/>
           <p:cNvSpPr txBox="1"/>
           <p:nvPr>
             <p:ph type="body" idx="1"/>
@@ -4833,7 +4833,7 @@
           <a:p>
             <a:pPr/>
             <a:r>
-              <a:t>We decided to go with a Svelte + Kotlin + PostgreSQL stack</a:t>
+              <a:t>We decided to go with a Svelte + Ktor + PostgreSQL stack</a:t>
             </a:r>
           </a:p>
         </p:txBody>
@@ -5022,7 +5022,7 @@
         </p:blipFill>
         <p:spPr>
           <a:xfrm>
-            <a:off x="15959183" y="2230617"/>
+            <a:off x="15959184" y="2230617"/>
             <a:ext cx="7696066" cy="5357715"/>
           </a:xfrm>
           <a:prstGeom prst="rect">
@@ -5052,7 +5052,7 @@
         <p:spPr>
           <a:xfrm>
             <a:off x="10248042" y="7675701"/>
-            <a:ext cx="9590006" cy="5244773"/>
+            <a:ext cx="9590007" cy="5244773"/>
           </a:xfrm>
           <a:prstGeom prst="rect">
             <a:avLst/>
@@ -5442,7 +5442,7 @@
         <p:spPr>
           <a:xfrm>
             <a:off x="10768252" y="7126656"/>
-            <a:ext cx="13182071" cy="4720871"/>
+            <a:ext cx="13182070" cy="4720871"/>
           </a:xfrm>
           <a:prstGeom prst="rect">
             <a:avLst/>
